--- a/deck/Saathi.pptx
+++ b/deck/Saathi.pptx
@@ -6565,7 +6565,7 @@
                 <a:ea typeface="Calibri" pitchFamily="34" charset="-122"/>
                 <a:cs typeface="Calibri" pitchFamily="34" charset="-120"/>
               </a:rPr>
-              <a:t>17,479 passages of Government of India advisory material</a:t>
+              <a:t>6,396 passages of Government of India advisory material</a:t>
             </a:r>
             <a:endParaRPr lang="en-US" sz="1250" dirty="0"/>
           </a:p>
